--- a/output/FOF资产配置新思路.pptx
+++ b/output/FOF资产配置新思路.pptx
@@ -4861,16 +4861,40 @@
           </a:p>
         </p:txBody>
       </p:sp>
-      <p:sp>
-        <p:nvSpPr>
-          <p:cNvPr id="9" name="TextBox 8"/>
-          <p:cNvSpPr txBox="1"/>
-          <p:nvPr/>
-        </p:nvSpPr>
-        <p:spPr>
-          <a:xfrm>
-            <a:off x="432000" y="1692000"/>
-            <a:ext cx="11328119" cy="4518000"/>
+      <p:pic>
+        <p:nvPicPr>
+          <p:cNvPr id="9" name="Picture 8" descr="chart_nine_assets_grid.png"/>
+          <p:cNvPicPr>
+            <a:picLocks noChangeAspect="1"/>
+          </p:cNvPicPr>
+          <p:nvPr/>
+        </p:nvPicPr>
+        <p:blipFill>
+          <a:blip r:embed="rId2"/>
+          <a:stretch>
+            <a:fillRect/>
+          </a:stretch>
+        </p:blipFill>
+        <p:spPr>
+          <a:xfrm>
+            <a:off x="2609666" y="1692000"/>
+            <a:ext cx="6972787" cy="3060000"/>
+          </a:xfrm>
+          <a:prstGeom prst="rect">
+            <a:avLst/>
+          </a:prstGeom>
+        </p:spPr>
+      </p:pic>
+      <p:sp>
+        <p:nvSpPr>
+          <p:cNvPr id="10" name="TextBox 9"/>
+          <p:cNvSpPr txBox="1"/>
+          <p:nvPr/>
+        </p:nvSpPr>
+        <p:spPr>
+          <a:xfrm>
+            <a:off x="432000" y="4860000"/>
+            <a:ext cx="11328119" cy="1530000"/>
           </a:xfrm>
           <a:prstGeom prst="rect">
             <a:avLst/>
@@ -4885,11 +4909,11 @@
           <a:p>
             <a:pPr algn="l">
               <a:lnSpc>
-                <a:spcPct val="155000"/>
+                <a:spcPct val="135000"/>
               </a:lnSpc>
             </a:pPr>
             <a:r>
-              <a:rPr sz="1700" b="1">
+              <a:rPr sz="1400" b="1">
                 <a:solidFill>
                   <a:srgbClr val="E0B574"/>
                 </a:solidFill>
@@ -4898,163 +4922,48 @@
               <a:t>■  </a:t>
             </a:r>
             <a:r>
-              <a:rPr sz="1700">
+              <a:rPr sz="1400">
                 <a:solidFill>
                   <a:srgbClr val="F2F4F7"/>
                 </a:solidFill>
                 <a:latin typeface="微软雅黑"/>
               </a:rPr>
-              <a:t>境内权益：沪深300 / 中证500 / 中证1000 —— 长期 β 与风格暴露</a:t>
-            </a:r>
-          </a:p>
-          <a:p>
-            <a:pPr algn="l">
-              <a:lnSpc>
-                <a:spcPct val="155000"/>
-              </a:lnSpc>
-            </a:pPr>
-            <a:r>
-              <a:rPr sz="1700" b="1">
-                <a:solidFill>
-                  <a:srgbClr val="E0B574"/>
-                </a:solidFill>
-                <a:latin typeface="微软雅黑"/>
-              </a:rPr>
-              <a:t>■  </a:t>
-            </a:r>
-            <a:r>
-              <a:rPr sz="1700">
-                <a:solidFill>
-                  <a:srgbClr val="F2F4F7"/>
-                </a:solidFill>
-                <a:latin typeface="微软雅黑"/>
-              </a:rPr>
-              <a:t>港股：恒生 / 恒生科技 / 高股息 —— 差异化 β、估值修复期权</a:t>
-            </a:r>
-          </a:p>
-          <a:p>
-            <a:pPr algn="l">
-              <a:lnSpc>
-                <a:spcPct val="155000"/>
-              </a:lnSpc>
-            </a:pPr>
-            <a:r>
-              <a:rPr sz="1700" b="1">
-                <a:solidFill>
-                  <a:srgbClr val="E0B574"/>
-                </a:solidFill>
-                <a:latin typeface="微软雅黑"/>
-              </a:rPr>
-              <a:t>■  </a:t>
-            </a:r>
-            <a:r>
-              <a:rPr sz="1700">
-                <a:solidFill>
-                  <a:srgbClr val="F2F4F7"/>
-                </a:solidFill>
-                <a:latin typeface="微软雅黑"/>
-              </a:rPr>
-              <a:t>海外权益：标普 / 纳指 / 欧洲 / 日本 / 印度 / 越南 —— 独立 β 来源</a:t>
-            </a:r>
-          </a:p>
-          <a:p>
-            <a:pPr algn="l">
-              <a:lnSpc>
-                <a:spcPct val="155000"/>
-              </a:lnSpc>
-            </a:pPr>
-            <a:r>
-              <a:rPr sz="1700" b="1">
-                <a:solidFill>
-                  <a:srgbClr val="E0B574"/>
-                </a:solidFill>
-                <a:latin typeface="微软雅黑"/>
-              </a:rPr>
-              <a:t>■  </a:t>
-            </a:r>
-            <a:r>
-              <a:rPr sz="1700">
-                <a:solidFill>
-                  <a:srgbClr val="F2F4F7"/>
-                </a:solidFill>
-                <a:latin typeface="微软雅黑"/>
-              </a:rPr>
-              <a:t>利率债 / 信用债：组合的“减震器”与稳定 carry 来源</a:t>
-            </a:r>
-          </a:p>
-          <a:p>
-            <a:pPr algn="l">
-              <a:lnSpc>
-                <a:spcPct val="155000"/>
-              </a:lnSpc>
-            </a:pPr>
-            <a:r>
-              <a:rPr sz="1700" b="1">
-                <a:solidFill>
-                  <a:srgbClr val="E0B574"/>
-                </a:solidFill>
-                <a:latin typeface="微软雅黑"/>
-              </a:rPr>
-              <a:t>■  </a:t>
-            </a:r>
-            <a:r>
-              <a:rPr sz="1700">
-                <a:solidFill>
-                  <a:srgbClr val="F2F4F7"/>
-                </a:solidFill>
-                <a:latin typeface="微软雅黑"/>
-              </a:rPr>
-              <a:t>黄金：避险与抗通胀；商品 ETF（豆粕 / 有色 / 能化）：再通胀场景对冲</a:t>
-            </a:r>
-          </a:p>
-          <a:p>
-            <a:pPr algn="l">
-              <a:lnSpc>
-                <a:spcPct val="155000"/>
-              </a:lnSpc>
-            </a:pPr>
-            <a:r>
-              <a:rPr sz="1700" b="1">
-                <a:solidFill>
-                  <a:srgbClr val="E0B574"/>
-                </a:solidFill>
-                <a:latin typeface="微软雅黑"/>
-              </a:rPr>
-              <a:t>■  </a:t>
-            </a:r>
-            <a:r>
-              <a:rPr sz="1700">
-                <a:solidFill>
-                  <a:srgbClr val="F2F4F7"/>
-                </a:solidFill>
-                <a:latin typeface="微软雅黑"/>
-              </a:rPr>
-              <a:t>公募 REITs：股债之外的第三类现金流，与股债相关性低</a:t>
-            </a:r>
-          </a:p>
-          <a:p>
-            <a:pPr algn="l">
-              <a:lnSpc>
-                <a:spcPct val="155000"/>
-              </a:lnSpc>
-            </a:pPr>
-            <a:r>
-              <a:rPr sz="1700" b="1">
-                <a:solidFill>
-                  <a:srgbClr val="E0B574"/>
-                </a:solidFill>
-                <a:latin typeface="微软雅黑"/>
-              </a:rPr>
-              <a:t>■  </a:t>
-            </a:r>
-            <a:r>
-              <a:rPr sz="1700">
-                <a:solidFill>
-                  <a:srgbClr val="F2F4F7"/>
-                </a:solidFill>
-                <a:latin typeface="微软雅黑"/>
-              </a:rPr>
-              <a:t>现金 / 货基：流动性管理与战术弹药</a:t>
+              <a:t>一个好的 FOF 组合 = 把风险来源分布在尽量多的“独立桶”里 ——下一页起逐一展开各类资产的研究与对比</a:t>
+            </a:r>
+          </a:p>
+        </p:txBody>
+      </p:sp>
+      <p:sp>
+        <p:nvSpPr>
+          <p:cNvPr id="11" name="TextBox 10"/>
+          <p:cNvSpPr txBox="1"/>
+          <p:nvPr/>
+        </p:nvSpPr>
+        <p:spPr>
+          <a:xfrm>
+            <a:off x="432000" y="6282000"/>
+            <a:ext cx="11160000" cy="216000"/>
+          </a:xfrm>
+          <a:prstGeom prst="rect">
+            <a:avLst/>
+          </a:prstGeom>
+          <a:noFill/>
+        </p:spPr>
+        <p:txBody>
+          <a:bodyPr wrap="square" lIns="36000" rIns="36000" tIns="18000" bIns="18000" anchor="t">
+            <a:spAutoFit/>
+          </a:bodyPr>
+          <a:lstStyle/>
+          <a:p>
+            <a:pPr algn="l"/>
+            <a:r>
+              <a:rPr sz="1000" b="0">
+                <a:solidFill>
+                  <a:srgbClr val="B6C4D6"/>
+                </a:solidFill>
+                <a:latin typeface="微软雅黑"/>
+              </a:rPr>
+              <a:t>数据来源：基于公开指数 2010—2025 口径估算，仅供示意</a:t>
             </a:r>
           </a:p>
         </p:txBody>
@@ -6270,7 +6179,7 @@
                 </a:solidFill>
                 <a:latin typeface="微软雅黑"/>
               </a:rPr>
-              <a:t>境内权益拆解：市值 × 风格的二维矩阵</a:t>
+              <a:t>境内权益拆解：市值 × 风格 二维矩阵</a:t>
             </a:r>
           </a:p>
         </p:txBody>
@@ -6310,16 +6219,40 @@
           </a:p>
         </p:txBody>
       </p:sp>
-      <p:sp>
-        <p:nvSpPr>
-          <p:cNvPr id="9" name="TextBox 8"/>
+      <p:pic>
+        <p:nvPicPr>
+          <p:cNvPr id="9" name="Picture 8" descr="chart_equity_matrix.png"/>
+          <p:cNvPicPr>
+            <a:picLocks noChangeAspect="1"/>
+          </p:cNvPicPr>
+          <p:nvPr/>
+        </p:nvPicPr>
+        <p:blipFill>
+          <a:blip r:embed="rId2"/>
+          <a:stretch>
+            <a:fillRect/>
+          </a:stretch>
+        </p:blipFill>
+        <p:spPr>
+          <a:xfrm>
+            <a:off x="5112000" y="1692000"/>
+            <a:ext cx="6480000" cy="3269725"/>
+          </a:xfrm>
+          <a:prstGeom prst="rect">
+            <a:avLst/>
+          </a:prstGeom>
+        </p:spPr>
+      </p:pic>
+      <p:sp>
+        <p:nvSpPr>
+          <p:cNvPr id="10" name="TextBox 9"/>
           <p:cNvSpPr txBox="1"/>
           <p:nvPr/>
         </p:nvSpPr>
         <p:spPr>
           <a:xfrm>
             <a:off x="432000" y="1692000"/>
-            <a:ext cx="11328119" cy="4518000"/>
+            <a:ext cx="4500000" cy="4518000"/>
           </a:xfrm>
           <a:prstGeom prst="rect">
             <a:avLst/>
@@ -6334,11 +6267,11 @@
           <a:p>
             <a:pPr algn="l">
               <a:lnSpc>
-                <a:spcPct val="155000"/>
+                <a:spcPct val="145000"/>
               </a:lnSpc>
             </a:pPr>
             <a:r>
-              <a:rPr sz="1700" b="1">
+              <a:rPr sz="1400" b="1">
                 <a:solidFill>
                   <a:srgbClr val="E0B574"/>
                 </a:solidFill>
@@ -6347,23 +6280,23 @@
               <a:t>■  </a:t>
             </a:r>
             <a:r>
-              <a:rPr sz="1700">
+              <a:rPr sz="1400">
                 <a:solidFill>
                   <a:srgbClr val="F2F4F7"/>
                 </a:solidFill>
                 <a:latin typeface="微软雅黑"/>
               </a:rPr>
-              <a:t>市值维度：沪深300（大盘价值/质量）/ 中证500（中盘成长）/ 中证1000（小盘高弹性）</a:t>
+              <a:t>市值维度：大盘 / 中盘 / 小盘 决定 β 与流动性</a:t>
             </a:r>
           </a:p>
           <a:p>
             <a:pPr algn="l">
               <a:lnSpc>
-                <a:spcPct val="155000"/>
+                <a:spcPct val="145000"/>
               </a:lnSpc>
             </a:pPr>
             <a:r>
-              <a:rPr sz="1700" b="1">
+              <a:rPr sz="1400" b="1">
                 <a:solidFill>
                   <a:srgbClr val="E0B574"/>
                 </a:solidFill>
@@ -6372,23 +6305,23 @@
               <a:t>■  </a:t>
             </a:r>
             <a:r>
-              <a:rPr sz="1700">
+              <a:rPr sz="1400">
                 <a:solidFill>
                   <a:srgbClr val="F2F4F7"/>
                 </a:solidFill>
                 <a:latin typeface="微软雅黑"/>
               </a:rPr>
-              <a:t>风格维度：红利低波（震荡市占优）/ 质量与成长（景气上行期占优）</a:t>
+              <a:t>风格维度：价值 / 红利 / 质量 / 成长 决定 α 与波动</a:t>
             </a:r>
           </a:p>
           <a:p>
             <a:pPr algn="l">
               <a:lnSpc>
-                <a:spcPct val="155000"/>
+                <a:spcPct val="145000"/>
               </a:lnSpc>
             </a:pPr>
             <a:r>
-              <a:rPr sz="1700" b="1">
+              <a:rPr sz="1400" b="1">
                 <a:solidFill>
                   <a:srgbClr val="E0B574"/>
                 </a:solidFill>
@@ -6397,23 +6330,23 @@
               <a:t>■  </a:t>
             </a:r>
             <a:r>
-              <a:rPr sz="1700">
+              <a:rPr sz="1400">
                 <a:solidFill>
                   <a:srgbClr val="F2F4F7"/>
                 </a:solidFill>
                 <a:latin typeface="微软雅黑"/>
               </a:rPr>
-              <a:t>行业维度：科创板 / 创业板 / 中证消费 / 中证医药 等主题指数补足结构性敞口</a:t>
+              <a:t>实战做法：宽基 + 风格 + 主题 三层组合，并通过风格轮动信号做动态再平衡</a:t>
             </a:r>
           </a:p>
           <a:p>
             <a:pPr algn="l">
               <a:lnSpc>
-                <a:spcPct val="155000"/>
+                <a:spcPct val="145000"/>
               </a:lnSpc>
             </a:pPr>
             <a:r>
-              <a:rPr sz="1700" b="1">
+              <a:rPr sz="1400" b="1">
                 <a:solidFill>
                   <a:srgbClr val="E0B574"/>
                 </a:solidFill>
@@ -6422,38 +6355,13 @@
               <a:t>■  </a:t>
             </a:r>
             <a:r>
-              <a:rPr sz="1700">
+              <a:rPr sz="1400">
                 <a:solidFill>
                   <a:srgbClr val="F2F4F7"/>
                 </a:solidFill>
                 <a:latin typeface="微软雅黑"/>
               </a:rPr>
-              <a:t>公募 FOF 的实战做法：宽基 + 风格 + 主题 三层组合，并通过风格轮动信号做动态再平衡</a:t>
-            </a:r>
-          </a:p>
-          <a:p>
-            <a:pPr algn="l">
-              <a:lnSpc>
-                <a:spcPct val="155000"/>
-              </a:lnSpc>
-            </a:pPr>
-            <a:r>
-              <a:rPr sz="1700" b="1">
-                <a:solidFill>
-                  <a:srgbClr val="E0B574"/>
-                </a:solidFill>
-                <a:latin typeface="微软雅黑"/>
-              </a:rPr>
-              <a:t>■  </a:t>
-            </a:r>
-            <a:r>
-              <a:rPr sz="1700">
-                <a:solidFill>
-                  <a:srgbClr val="F2F4F7"/>
-                </a:solidFill>
-                <a:latin typeface="微软雅黑"/>
-              </a:rPr>
-              <a:t>工具选择：宽基用 ETF 控成本，风格 / 主题可结合主动基金获取增厚</a:t>
+              <a:t>工具选择：宽基用 ETF 控成本，风格 / 主题结合主动基金获取增厚</a:t>
             </a:r>
           </a:p>
         </p:txBody>
@@ -7591,16 +7499,40 @@
           </a:p>
         </p:txBody>
       </p:sp>
-      <p:sp>
-        <p:nvSpPr>
-          <p:cNvPr id="9" name="TextBox 8"/>
+      <p:pic>
+        <p:nvPicPr>
+          <p:cNvPr id="9" name="Picture 8" descr="chart_bond_allocation.png"/>
+          <p:cNvPicPr>
+            <a:picLocks noChangeAspect="1"/>
+          </p:cNvPicPr>
+          <p:nvPr/>
+        </p:nvPicPr>
+        <p:blipFill>
+          <a:blip r:embed="rId2"/>
+          <a:stretch>
+            <a:fillRect/>
+          </a:stretch>
+        </p:blipFill>
+        <p:spPr>
+          <a:xfrm>
+            <a:off x="5112000" y="1692000"/>
+            <a:ext cx="5736164" cy="4518000"/>
+          </a:xfrm>
+          <a:prstGeom prst="rect">
+            <a:avLst/>
+          </a:prstGeom>
+        </p:spPr>
+      </p:pic>
+      <p:sp>
+        <p:nvSpPr>
+          <p:cNvPr id="10" name="TextBox 9"/>
           <p:cNvSpPr txBox="1"/>
           <p:nvPr/>
         </p:nvSpPr>
         <p:spPr>
           <a:xfrm>
             <a:off x="432000" y="1692000"/>
-            <a:ext cx="11328119" cy="4518000"/>
+            <a:ext cx="4500000" cy="4518000"/>
           </a:xfrm>
           <a:prstGeom prst="rect">
             <a:avLst/>
@@ -7615,11 +7547,11 @@
           <a:p>
             <a:pPr algn="l">
               <a:lnSpc>
-                <a:spcPct val="155000"/>
+                <a:spcPct val="145000"/>
               </a:lnSpc>
             </a:pPr>
             <a:r>
-              <a:rPr sz="1700" b="1">
+              <a:rPr sz="1400" b="1">
                 <a:solidFill>
                   <a:srgbClr val="E0B574"/>
                 </a:solidFill>
@@ -7628,23 +7560,23 @@
               <a:t>■  </a:t>
             </a:r>
             <a:r>
-              <a:rPr sz="1700">
+              <a:rPr sz="1400">
                 <a:solidFill>
                   <a:srgbClr val="F2F4F7"/>
                 </a:solidFill>
                 <a:latin typeface="微软雅黑"/>
               </a:rPr>
-              <a:t>利率债（国债 / 政金债）：组合的减震器，与权益负相关或低相关</a:t>
+              <a:t>利率债（国债 / 政金债）：组合减震器，与权益负相关或低相关</a:t>
             </a:r>
           </a:p>
           <a:p>
             <a:pPr algn="l">
               <a:lnSpc>
-                <a:spcPct val="155000"/>
+                <a:spcPct val="145000"/>
               </a:lnSpc>
             </a:pPr>
             <a:r>
-              <a:rPr sz="1700" b="1">
+              <a:rPr sz="1400" b="1">
                 <a:solidFill>
                   <a:srgbClr val="E0B574"/>
                 </a:solidFill>
@@ -7653,23 +7585,23 @@
               <a:t>■  </a:t>
             </a:r>
             <a:r>
-              <a:rPr sz="1700">
+              <a:rPr sz="1400">
                 <a:solidFill>
                   <a:srgbClr val="F2F4F7"/>
                 </a:solidFill>
                 <a:latin typeface="微软雅黑"/>
               </a:rPr>
-              <a:t>高等级信用债：稳定 carry，需控制单券集中度与行业暴露</a:t>
+              <a:t>高等级信用债：稳定 carry，控制单券集中度与行业暴露</a:t>
             </a:r>
           </a:p>
           <a:p>
             <a:pPr algn="l">
               <a:lnSpc>
-                <a:spcPct val="155000"/>
+                <a:spcPct val="145000"/>
               </a:lnSpc>
             </a:pPr>
             <a:r>
-              <a:rPr sz="1700" b="1">
+              <a:rPr sz="1400" b="1">
                 <a:solidFill>
                   <a:srgbClr val="E0B574"/>
                 </a:solidFill>
@@ -7678,23 +7610,23 @@
               <a:t>■  </a:t>
             </a:r>
             <a:r>
-              <a:rPr sz="1700">
+              <a:rPr sz="1400">
                 <a:solidFill>
                   <a:srgbClr val="F2F4F7"/>
                 </a:solidFill>
                 <a:latin typeface="微软雅黑"/>
               </a:rPr>
-              <a:t>可转债：股性 / 债性切换的“option”，在权益估值底部具备非对称性</a:t>
+              <a:t>可转债：股 / 债切换的“option”，权益估值底部具备非对称性</a:t>
             </a:r>
           </a:p>
           <a:p>
             <a:pPr algn="l">
               <a:lnSpc>
-                <a:spcPct val="155000"/>
+                <a:spcPct val="145000"/>
               </a:lnSpc>
             </a:pPr>
             <a:r>
-              <a:rPr sz="1700" b="1">
+              <a:rPr sz="1400" b="1">
                 <a:solidFill>
                   <a:srgbClr val="E0B574"/>
                 </a:solidFill>
@@ -7703,23 +7635,23 @@
               <a:t>■  </a:t>
             </a:r>
             <a:r>
-              <a:rPr sz="1700">
+              <a:rPr sz="1400">
                 <a:solidFill>
                   <a:srgbClr val="F2F4F7"/>
                 </a:solidFill>
                 <a:latin typeface="微软雅黑"/>
               </a:rPr>
-              <a:t>中资美元债（QDII）：捕捉美元利率与中资信用利差，兼具汇率敞口</a:t>
+              <a:t>中资美元债（QDII）：美元 carry +中资信用利差 + 汇率敞口</a:t>
             </a:r>
           </a:p>
           <a:p>
             <a:pPr algn="l">
               <a:lnSpc>
-                <a:spcPct val="155000"/>
+                <a:spcPct val="145000"/>
               </a:lnSpc>
             </a:pPr>
             <a:r>
-              <a:rPr sz="1700" b="1">
+              <a:rPr sz="1400" b="1">
                 <a:solidFill>
                   <a:srgbClr val="E0B574"/>
                 </a:solidFill>
@@ -7728,13 +7660,13 @@
               <a:t>■  </a:t>
             </a:r>
             <a:r>
-              <a:rPr sz="1700">
+              <a:rPr sz="1400">
                 <a:solidFill>
                   <a:srgbClr val="F2F4F7"/>
                 </a:solidFill>
                 <a:latin typeface="微软雅黑"/>
               </a:rPr>
-              <a:t>稳健型 FOF 债券底仓建议：利率 40% · 信用 40% · 转债 10% · 美元债 10%</a:t>
+              <a:t>→ 右图：稳健型 FOF 债券底仓建议配比</a:t>
             </a:r>
           </a:p>
         </p:txBody>
@@ -11516,21 +11448,45 @@
                 </a:solidFill>
                 <a:latin typeface="微软雅黑"/>
               </a:rPr>
-              <a:t>让真实风险敞口与管理者意图保持一致</a:t>
-            </a:r>
-          </a:p>
-        </p:txBody>
-      </p:sp>
-      <p:sp>
-        <p:nvSpPr>
-          <p:cNvPr id="9" name="TextBox 8"/>
+              <a:t>同一个 60 / 40 ：左为资金权重，右为真实风险贡献</a:t>
+            </a:r>
+          </a:p>
+        </p:txBody>
+      </p:sp>
+      <p:pic>
+        <p:nvPicPr>
+          <p:cNvPr id="9" name="Picture 8" descr="chart_risk_budget.png"/>
+          <p:cNvPicPr>
+            <a:picLocks noChangeAspect="1"/>
+          </p:cNvPicPr>
+          <p:nvPr/>
+        </p:nvPicPr>
+        <p:blipFill>
+          <a:blip r:embed="rId2"/>
+          <a:stretch>
+            <a:fillRect/>
+          </a:stretch>
+        </p:blipFill>
+        <p:spPr>
+          <a:xfrm>
+            <a:off x="5112000" y="1692000"/>
+            <a:ext cx="6300000" cy="3511083"/>
+          </a:xfrm>
+          <a:prstGeom prst="rect">
+            <a:avLst/>
+          </a:prstGeom>
+        </p:spPr>
+      </p:pic>
+      <p:sp>
+        <p:nvSpPr>
+          <p:cNvPr id="10" name="TextBox 9"/>
           <p:cNvSpPr txBox="1"/>
           <p:nvPr/>
         </p:nvSpPr>
         <p:spPr>
           <a:xfrm>
             <a:off x="432000" y="1692000"/>
-            <a:ext cx="11328119" cy="4518000"/>
+            <a:ext cx="4500000" cy="4518000"/>
           </a:xfrm>
           <a:prstGeom prst="rect">
             <a:avLst/>
@@ -11545,11 +11501,11 @@
           <a:p>
             <a:pPr algn="l">
               <a:lnSpc>
-                <a:spcPct val="155000"/>
+                <a:spcPct val="145000"/>
               </a:lnSpc>
             </a:pPr>
             <a:r>
-              <a:rPr sz="1700" b="1">
+              <a:rPr sz="1400" b="1">
                 <a:solidFill>
                   <a:srgbClr val="E0B574"/>
                 </a:solidFill>
@@ -11558,23 +11514,23 @@
               <a:t>■  </a:t>
             </a:r>
             <a:r>
-              <a:rPr sz="1700">
+              <a:rPr sz="1400">
                 <a:solidFill>
                   <a:srgbClr val="F2F4F7"/>
                 </a:solidFill>
                 <a:latin typeface="微软雅黑"/>
               </a:rPr>
-              <a:t>传统 60/40 组合：股票占资金 60%，但贡献组合波动 90%+</a:t>
+              <a:t>60/40 名义“股 6 债 4”，实际股票贡献组合波动 90%+</a:t>
             </a:r>
           </a:p>
           <a:p>
             <a:pPr algn="l">
               <a:lnSpc>
-                <a:spcPct val="155000"/>
+                <a:spcPct val="145000"/>
               </a:lnSpc>
             </a:pPr>
             <a:r>
-              <a:rPr sz="1700" b="1">
+              <a:rPr sz="1400" b="1">
                 <a:solidFill>
                   <a:srgbClr val="E0B574"/>
                 </a:solidFill>
@@ -11583,23 +11539,23 @@
               <a:t>■  </a:t>
             </a:r>
             <a:r>
-              <a:rPr sz="1700">
+              <a:rPr sz="1400">
                 <a:solidFill>
                   <a:srgbClr val="F2F4F7"/>
                 </a:solidFill>
                 <a:latin typeface="微软雅黑"/>
               </a:rPr>
-              <a:t>风险预算：按风险贡献分配，若希望股债风险贡献 50/50，股票资金权重通常仅 25%—30%</a:t>
+              <a:t>风险预算：按风险贡献分配，股债 50/50 风险贡献对应资金权重约 25/75</a:t>
             </a:r>
           </a:p>
           <a:p>
             <a:pPr algn="l">
               <a:lnSpc>
-                <a:spcPct val="155000"/>
+                <a:spcPct val="145000"/>
               </a:lnSpc>
             </a:pPr>
             <a:r>
-              <a:rPr sz="1700" b="1">
+              <a:rPr sz="1400" b="1">
                 <a:solidFill>
                   <a:srgbClr val="E0B574"/>
                 </a:solidFill>
@@ -11608,7 +11564,7 @@
               <a:t>■  </a:t>
             </a:r>
             <a:r>
-              <a:rPr sz="1700">
+              <a:rPr sz="1400">
                 <a:solidFill>
                   <a:srgbClr val="F2F4F7"/>
                 </a:solidFill>
@@ -11620,11 +11576,11 @@
           <a:p>
             <a:pPr algn="l">
               <a:lnSpc>
-                <a:spcPct val="155000"/>
+                <a:spcPct val="145000"/>
               </a:lnSpc>
             </a:pPr>
             <a:r>
-              <a:rPr sz="1700" b="1">
+              <a:rPr sz="1400" b="1">
                 <a:solidFill>
                   <a:srgbClr val="E0B574"/>
                 </a:solidFill>
@@ -11633,23 +11589,23 @@
               <a:t>■  </a:t>
             </a:r>
             <a:r>
-              <a:rPr sz="1700">
+              <a:rPr sz="1400">
                 <a:solidFill>
                   <a:srgbClr val="F2F4F7"/>
                 </a:solidFill>
                 <a:latin typeface="微软雅黑"/>
               </a:rPr>
-              <a:t>落地：以波动率 / VaR / 边际贡献作为度量，进入组合优化器</a:t>
+              <a:t>落地：以波动率 / VaR / 边际贡献为度量，进入组合优化器</a:t>
             </a:r>
           </a:p>
           <a:p>
             <a:pPr algn="l">
               <a:lnSpc>
-                <a:spcPct val="155000"/>
+                <a:spcPct val="145000"/>
               </a:lnSpc>
             </a:pPr>
             <a:r>
-              <a:rPr sz="1700" b="1">
+              <a:rPr sz="1400" b="1">
                 <a:solidFill>
                   <a:srgbClr val="E0B574"/>
                 </a:solidFill>
@@ -11658,13 +11614,13 @@
               <a:t>■  </a:t>
             </a:r>
             <a:r>
-              <a:rPr sz="1700">
+              <a:rPr sz="1400">
                 <a:solidFill>
                   <a:srgbClr val="F2F4F7"/>
                 </a:solidFill>
                 <a:latin typeface="微软雅黑"/>
               </a:rPr>
-              <a:t>公募 FOF 的合规优势：风险预算可被结构化写入合同与日常合规监控</a:t>
+              <a:t>公募 FOF 合规优势：风险预算可写入合同与日常合规监控</a:t>
             </a:r>
           </a:p>
         </p:txBody>
@@ -14648,21 +14604,45 @@
                 </a:solidFill>
                 <a:latin typeface="微软雅黑"/>
               </a:rPr>
-              <a:t>定期 · 阈值 · 波动率触发  三种机制对比</a:t>
-            </a:r>
-          </a:p>
-        </p:txBody>
-      </p:sp>
-      <p:sp>
-        <p:nvSpPr>
-          <p:cNvPr id="9" name="TextBox 8"/>
-          <p:cNvSpPr txBox="1"/>
-          <p:nvPr/>
-        </p:nvSpPr>
-        <p:spPr>
-          <a:xfrm>
-            <a:off x="432000" y="1692000"/>
-            <a:ext cx="11328119" cy="4518000"/>
+              <a:t>定期 · 阈值 · 波动率触发  三种机制直观对比</a:t>
+            </a:r>
+          </a:p>
+        </p:txBody>
+      </p:sp>
+      <p:pic>
+        <p:nvPicPr>
+          <p:cNvPr id="9" name="Picture 8" descr="chart_rebalance_compare.png"/>
+          <p:cNvPicPr>
+            <a:picLocks noChangeAspect="1"/>
+          </p:cNvPicPr>
+          <p:nvPr/>
+        </p:nvPicPr>
+        <p:blipFill>
+          <a:blip r:embed="rId2"/>
+          <a:stretch>
+            <a:fillRect/>
+          </a:stretch>
+        </p:blipFill>
+        <p:spPr>
+          <a:xfrm>
+            <a:off x="1606983" y="1692000"/>
+            <a:ext cx="8978153" cy="3060000"/>
+          </a:xfrm>
+          <a:prstGeom prst="rect">
+            <a:avLst/>
+          </a:prstGeom>
+        </p:spPr>
+      </p:pic>
+      <p:sp>
+        <p:nvSpPr>
+          <p:cNvPr id="10" name="TextBox 9"/>
+          <p:cNvSpPr txBox="1"/>
+          <p:nvPr/>
+        </p:nvSpPr>
+        <p:spPr>
+          <a:xfrm>
+            <a:off x="432000" y="4860000"/>
+            <a:ext cx="11328119" cy="1530000"/>
           </a:xfrm>
           <a:prstGeom prst="rect">
             <a:avLst/>
@@ -14677,11 +14657,11 @@
           <a:p>
             <a:pPr algn="l">
               <a:lnSpc>
-                <a:spcPct val="155000"/>
+                <a:spcPct val="135000"/>
               </a:lnSpc>
             </a:pPr>
             <a:r>
-              <a:rPr sz="1700" b="1">
+              <a:rPr sz="1400" b="1">
                 <a:solidFill>
                   <a:srgbClr val="E0B574"/>
                 </a:solidFill>
@@ -14690,23 +14670,23 @@
               <a:t>■  </a:t>
             </a:r>
             <a:r>
-              <a:rPr sz="1700">
+              <a:rPr sz="1400">
                 <a:solidFill>
                   <a:srgbClr val="F2F4F7"/>
                 </a:solidFill>
                 <a:latin typeface="微软雅黑"/>
               </a:rPr>
-              <a:t>定期：每季 / 每半年，简单有纪律，但可能错过结构性机会</a:t>
+              <a:t>定期：纪律性强但可能错过结构性机会 · 阈值：智能但交易频率不可控 · 波动率触发：敏感、适合稳波动产品</a:t>
             </a:r>
           </a:p>
           <a:p>
             <a:pPr algn="l">
               <a:lnSpc>
-                <a:spcPct val="155000"/>
+                <a:spcPct val="135000"/>
               </a:lnSpc>
             </a:pPr>
             <a:r>
-              <a:rPr sz="1700" b="1">
+              <a:rPr sz="1400" b="1">
                 <a:solidFill>
                   <a:srgbClr val="E0B574"/>
                 </a:solidFill>
@@ -14715,88 +14695,13 @@
               <a:t>■  </a:t>
             </a:r>
             <a:r>
-              <a:rPr sz="1700">
+              <a:rPr sz="1400">
                 <a:solidFill>
                   <a:srgbClr val="F2F4F7"/>
                 </a:solidFill>
                 <a:latin typeface="微软雅黑"/>
               </a:rPr>
-              <a:t>阈值：偏离目标权重 ±5% / ±10% 即触发，智能但交易频率不可控</a:t>
-            </a:r>
-          </a:p>
-          <a:p>
-            <a:pPr algn="l">
-              <a:lnSpc>
-                <a:spcPct val="155000"/>
-              </a:lnSpc>
-            </a:pPr>
-            <a:r>
-              <a:rPr sz="1700" b="1">
-                <a:solidFill>
-                  <a:srgbClr val="E0B574"/>
-                </a:solidFill>
-                <a:latin typeface="微软雅黑"/>
-              </a:rPr>
-              <a:t>■  </a:t>
-            </a:r>
-            <a:r>
-              <a:rPr sz="1700">
-                <a:solidFill>
-                  <a:srgbClr val="F2F4F7"/>
-                </a:solidFill>
-                <a:latin typeface="微软雅黑"/>
-              </a:rPr>
-              <a:t>波动率触发：组合波动突破阈值即降仓，适合追求稳定波动的产品</a:t>
-            </a:r>
-          </a:p>
-          <a:p>
-            <a:pPr algn="l">
-              <a:lnSpc>
-                <a:spcPct val="155000"/>
-              </a:lnSpc>
-            </a:pPr>
-            <a:r>
-              <a:rPr sz="1700" b="1">
-                <a:solidFill>
-                  <a:srgbClr val="E0B574"/>
-                </a:solidFill>
-                <a:latin typeface="微软雅黑"/>
-              </a:rPr>
-              <a:t>■  </a:t>
-            </a:r>
-            <a:r>
-              <a:rPr sz="1700">
-                <a:solidFill>
-                  <a:srgbClr val="F2F4F7"/>
-                </a:solidFill>
-                <a:latin typeface="微软雅黑"/>
-              </a:rPr>
-              <a:t>实践组合：定期为主 + 阈值为辅 + 波动率为应急</a:t>
-            </a:r>
-          </a:p>
-          <a:p>
-            <a:pPr algn="l">
-              <a:lnSpc>
-                <a:spcPct val="155000"/>
-              </a:lnSpc>
-            </a:pPr>
-            <a:r>
-              <a:rPr sz="1700" b="1">
-                <a:solidFill>
-                  <a:srgbClr val="E0B574"/>
-                </a:solidFill>
-                <a:latin typeface="微软雅黑"/>
-              </a:rPr>
-              <a:t>■  </a:t>
-            </a:r>
-            <a:r>
-              <a:rPr sz="1700">
-                <a:solidFill>
-                  <a:srgbClr val="F2F4F7"/>
-                </a:solidFill>
-                <a:latin typeface="微软雅黑"/>
-              </a:rPr>
-              <a:t>长期 α 贡献：经验上 0.3%—0.8% 年化，且能显著平滑客户体验</a:t>
+              <a:t>实践组合：定期为主  +  阈值为辅  +  波动率为应急；长期 α 经验值 0.3%—0.8% / 年</a:t>
             </a:r>
           </a:p>
         </p:txBody>
@@ -18112,16 +18017,40 @@
           </a:p>
         </p:txBody>
       </p:sp>
-      <p:sp>
-        <p:nvSpPr>
-          <p:cNvPr id="9" name="TextBox 8"/>
+      <p:pic>
+        <p:nvPicPr>
+          <p:cNvPr id="9" name="Picture 8" descr="chart_alternative_alloc.png"/>
+          <p:cNvPicPr>
+            <a:picLocks noChangeAspect="1"/>
+          </p:cNvPicPr>
+          <p:nvPr/>
+        </p:nvPicPr>
+        <p:blipFill>
+          <a:blip r:embed="rId2"/>
+          <a:stretch>
+            <a:fillRect/>
+          </a:stretch>
+        </p:blipFill>
+        <p:spPr>
+          <a:xfrm>
+            <a:off x="5112000" y="1692000"/>
+            <a:ext cx="6300000" cy="3496023"/>
+          </a:xfrm>
+          <a:prstGeom prst="rect">
+            <a:avLst/>
+          </a:prstGeom>
+        </p:spPr>
+      </p:pic>
+      <p:sp>
+        <p:nvSpPr>
+          <p:cNvPr id="10" name="TextBox 9"/>
           <p:cNvSpPr txBox="1"/>
           <p:nvPr/>
         </p:nvSpPr>
         <p:spPr>
           <a:xfrm>
             <a:off x="432000" y="1692000"/>
-            <a:ext cx="11328119" cy="4518000"/>
+            <a:ext cx="4500000" cy="4518000"/>
           </a:xfrm>
           <a:prstGeom prst="rect">
             <a:avLst/>
@@ -18136,11 +18065,11 @@
           <a:p>
             <a:pPr algn="l">
               <a:lnSpc>
-                <a:spcPct val="155000"/>
+                <a:spcPct val="145000"/>
               </a:lnSpc>
             </a:pPr>
             <a:r>
-              <a:rPr sz="1700" b="1">
+              <a:rPr sz="1400" b="1">
                 <a:solidFill>
                   <a:srgbClr val="E0B574"/>
                 </a:solidFill>
@@ -18149,7 +18078,7 @@
               <a:t>■  </a:t>
             </a:r>
             <a:r>
-              <a:rPr sz="1700">
+              <a:rPr sz="1400">
                 <a:solidFill>
                   <a:srgbClr val="F2F4F7"/>
                 </a:solidFill>
@@ -18161,11 +18090,11 @@
           <a:p>
             <a:pPr algn="l">
               <a:lnSpc>
-                <a:spcPct val="155000"/>
+                <a:spcPct val="145000"/>
               </a:lnSpc>
             </a:pPr>
             <a:r>
-              <a:rPr sz="1700" b="1">
+              <a:rPr sz="1400" b="1">
                 <a:solidFill>
                   <a:srgbClr val="E0B574"/>
                 </a:solidFill>
@@ -18174,23 +18103,23 @@
               <a:t>■  </a:t>
             </a:r>
             <a:r>
-              <a:rPr sz="1700">
+              <a:rPr sz="1400">
                 <a:solidFill>
                   <a:srgbClr val="F2F4F7"/>
                 </a:solidFill>
                 <a:latin typeface="微软雅黑"/>
               </a:rPr>
-              <a:t>目标：未来提升至 5%—15%</a:t>
+              <a:t>目标：合计配比 6%—15%</a:t>
             </a:r>
           </a:p>
           <a:p>
             <a:pPr algn="l">
               <a:lnSpc>
-                <a:spcPct val="155000"/>
+                <a:spcPct val="145000"/>
               </a:lnSpc>
             </a:pPr>
             <a:r>
-              <a:rPr sz="1700" b="1">
+              <a:rPr sz="1400" b="1">
                 <a:solidFill>
                   <a:srgbClr val="E0B574"/>
                 </a:solidFill>
@@ -18199,23 +18128,23 @@
               <a:t>■  </a:t>
             </a:r>
             <a:r>
-              <a:rPr sz="1700">
+              <a:rPr sz="1400">
                 <a:solidFill>
                   <a:srgbClr val="F2F4F7"/>
                 </a:solidFill>
                 <a:latin typeface="微软雅黑"/>
               </a:rPr>
-              <a:t>构成：公募 REITs 3%—8%、黄金 ETF 5%—10%、商品 ETF 0%—5%</a:t>
+              <a:t>构成：公募 REITs · 黄金 ETF · 商品 ETF</a:t>
             </a:r>
           </a:p>
           <a:p>
             <a:pPr algn="l">
               <a:lnSpc>
-                <a:spcPct val="155000"/>
+                <a:spcPct val="145000"/>
               </a:lnSpc>
             </a:pPr>
             <a:r>
-              <a:rPr sz="1700" b="1">
+              <a:rPr sz="1400" b="1">
                 <a:solidFill>
                   <a:srgbClr val="E0B574"/>
                 </a:solidFill>
@@ -18224,7 +18153,7 @@
               <a:t>■  </a:t>
             </a:r>
             <a:r>
-              <a:rPr sz="1700">
+              <a:rPr sz="1400">
                 <a:solidFill>
                   <a:srgbClr val="F2F4F7"/>
                 </a:solidFill>
@@ -18236,11 +18165,11 @@
           <a:p>
             <a:pPr algn="l">
               <a:lnSpc>
-                <a:spcPct val="155000"/>
+                <a:spcPct val="145000"/>
               </a:lnSpc>
             </a:pPr>
             <a:r>
-              <a:rPr sz="1700" b="1">
+              <a:rPr sz="1400" b="1">
                 <a:solidFill>
                   <a:srgbClr val="E0B574"/>
                 </a:solidFill>
@@ -18249,13 +18178,13 @@
               <a:t>■  </a:t>
             </a:r>
             <a:r>
-              <a:rPr sz="1700">
+              <a:rPr sz="1400">
                 <a:solidFill>
                   <a:srgbClr val="F2F4F7"/>
                 </a:solidFill>
                 <a:latin typeface="微软雅黑"/>
               </a:rPr>
-              <a:t>差异化：在公募 FOF 的“红海产品”中形成清晰区分度</a:t>
+              <a:t>差异化：在“红海产品”中形成清晰区分度</a:t>
             </a:r>
           </a:p>
         </p:txBody>
@@ -18966,16 +18895,40 @@
           </a:p>
         </p:txBody>
       </p:sp>
-      <p:sp>
-        <p:nvSpPr>
-          <p:cNvPr id="9" name="TextBox 8"/>
+      <p:pic>
+        <p:nvPicPr>
+          <p:cNvPr id="9" name="Picture 8" descr="chart_glide_path.png"/>
+          <p:cNvPicPr>
+            <a:picLocks noChangeAspect="1"/>
+          </p:cNvPicPr>
+          <p:nvPr/>
+        </p:nvPicPr>
+        <p:blipFill>
+          <a:blip r:embed="rId2"/>
+          <a:stretch>
+            <a:fillRect/>
+          </a:stretch>
+        </p:blipFill>
+        <p:spPr>
+          <a:xfrm>
+            <a:off x="5112000" y="1692000"/>
+            <a:ext cx="6300000" cy="3372727"/>
+          </a:xfrm>
+          <a:prstGeom prst="rect">
+            <a:avLst/>
+          </a:prstGeom>
+        </p:spPr>
+      </p:pic>
+      <p:sp>
+        <p:nvSpPr>
+          <p:cNvPr id="10" name="TextBox 9"/>
           <p:cNvSpPr txBox="1"/>
           <p:nvPr/>
         </p:nvSpPr>
         <p:spPr>
           <a:xfrm>
             <a:off x="432000" y="1692000"/>
-            <a:ext cx="11328119" cy="4518000"/>
+            <a:ext cx="4500000" cy="4518000"/>
           </a:xfrm>
           <a:prstGeom prst="rect">
             <a:avLst/>
@@ -18990,11 +18943,11 @@
           <a:p>
             <a:pPr algn="l">
               <a:lnSpc>
-                <a:spcPct val="155000"/>
+                <a:spcPct val="145000"/>
               </a:lnSpc>
             </a:pPr>
             <a:r>
-              <a:rPr sz="1700" b="1">
+              <a:rPr sz="1400" b="1">
                 <a:solidFill>
                   <a:srgbClr val="E0B574"/>
                 </a:solidFill>
@@ -19003,23 +18956,23 @@
               <a:t>■  </a:t>
             </a:r>
             <a:r>
-              <a:rPr sz="1700">
+              <a:rPr sz="1400">
                 <a:solidFill>
                   <a:srgbClr val="F2F4F7"/>
                 </a:solidFill>
                 <a:latin typeface="微软雅黑"/>
               </a:rPr>
-              <a:t>下滑曲线：客户距离退休年限缩短 →权益仓位从 80% 逐步降至 20%</a:t>
+              <a:t>下滑曲线：客户距退休年限缩短 →权益仓位从 80% 逐步降至 20%</a:t>
             </a:r>
           </a:p>
           <a:p>
             <a:pPr algn="l">
               <a:lnSpc>
-                <a:spcPct val="155000"/>
+                <a:spcPct val="145000"/>
               </a:lnSpc>
             </a:pPr>
             <a:r>
-              <a:rPr sz="1700" b="1">
+              <a:rPr sz="1400" b="1">
                 <a:solidFill>
                   <a:srgbClr val="E0B574"/>
                 </a:solidFill>
@@ -19028,23 +18981,23 @@
               <a:t>■  </a:t>
             </a:r>
             <a:r>
-              <a:rPr sz="1700">
+              <a:rPr sz="1400">
                 <a:solidFill>
                   <a:srgbClr val="F2F4F7"/>
                 </a:solidFill>
                 <a:latin typeface="微软雅黑"/>
               </a:rPr>
-              <a:t>本土化要点 1：下滑曲线斜率更陡（国内权益波动更大）</a:t>
+              <a:t>本土化 1：下滑曲线斜率更陡（国内权益波动更大）</a:t>
             </a:r>
           </a:p>
           <a:p>
             <a:pPr algn="l">
               <a:lnSpc>
-                <a:spcPct val="155000"/>
+                <a:spcPct val="145000"/>
               </a:lnSpc>
             </a:pPr>
             <a:r>
-              <a:rPr sz="1700" b="1">
+              <a:rPr sz="1400" b="1">
                 <a:solidFill>
                   <a:srgbClr val="E0B574"/>
                 </a:solidFill>
@@ -19053,23 +19006,23 @@
               <a:t>■  </a:t>
             </a:r>
             <a:r>
-              <a:rPr sz="1700">
+              <a:rPr sz="1400">
                 <a:solidFill>
                   <a:srgbClr val="F2F4F7"/>
                 </a:solidFill>
                 <a:latin typeface="微软雅黑"/>
               </a:rPr>
-              <a:t>本土化要点 2：退休后阶段把高股息 + REITs 作为核心仓位</a:t>
+              <a:t>本土化 2：退休后阶段以高股息 + REITs 为核心仓位</a:t>
             </a:r>
           </a:p>
           <a:p>
             <a:pPr algn="l">
               <a:lnSpc>
-                <a:spcPct val="155000"/>
+                <a:spcPct val="145000"/>
               </a:lnSpc>
             </a:pPr>
             <a:r>
-              <a:rPr sz="1700" b="1">
+              <a:rPr sz="1400" b="1">
                 <a:solidFill>
                   <a:srgbClr val="E0B574"/>
                 </a:solidFill>
@@ -19078,23 +19031,23 @@
               <a:t>■  </a:t>
             </a:r>
             <a:r>
-              <a:rPr sz="1700">
+              <a:rPr sz="1400">
                 <a:solidFill>
                   <a:srgbClr val="F2F4F7"/>
                 </a:solidFill>
                 <a:latin typeface="微软雅黑"/>
               </a:rPr>
-              <a:t>本土化要点 3：海外资产作为分散源，降低单一市场风险</a:t>
+              <a:t>本土化 3：海外资产作分散源，降低单一市场风险</a:t>
             </a:r>
           </a:p>
           <a:p>
             <a:pPr algn="l">
               <a:lnSpc>
-                <a:spcPct val="155000"/>
+                <a:spcPct val="145000"/>
               </a:lnSpc>
             </a:pPr>
             <a:r>
-              <a:rPr sz="1700" b="1">
+              <a:rPr sz="1400" b="1">
                 <a:solidFill>
                   <a:srgbClr val="E0B574"/>
                 </a:solidFill>
@@ -19103,13 +19056,13 @@
               <a:t>■  </a:t>
             </a:r>
             <a:r>
-              <a:rPr sz="1700">
+              <a:rPr sz="1400">
                 <a:solidFill>
                   <a:srgbClr val="F2F4F7"/>
                 </a:solidFill>
                 <a:latin typeface="微软雅黑"/>
               </a:rPr>
-              <a:t>渠道落地：与银行养老金账户深度结合，嵌入定投与“目标日期一键配置”</a:t>
+              <a:t>渠道落地：与银行养老金账户深度结合，嵌入定投与“一键配置”</a:t>
             </a:r>
           </a:p>
         </p:txBody>
@@ -24269,21 +24222,45 @@
                 </a:solidFill>
                 <a:latin typeface="微软雅黑"/>
               </a:rPr>
-              <a:t>从均值方差 → 风险平价 → 因子投资 → 目标日期 / 目标风险</a:t>
-            </a:r>
-          </a:p>
-        </p:txBody>
-      </p:sp>
-      <p:sp>
-        <p:nvSpPr>
-          <p:cNvPr id="9" name="TextBox 8"/>
-          <p:cNvSpPr txBox="1"/>
-          <p:nvPr/>
-        </p:nvSpPr>
-        <p:spPr>
-          <a:xfrm>
-            <a:off x="432000" y="1692000"/>
-            <a:ext cx="11328119" cy="4518000"/>
+              <a:t>70 年理论积淀，公募 FOF 是其零售化的产品载体</a:t>
+            </a:r>
+          </a:p>
+        </p:txBody>
+      </p:sp>
+      <p:pic>
+        <p:nvPicPr>
+          <p:cNvPr id="9" name="Picture 8" descr="chart_theory_timeline.png"/>
+          <p:cNvPicPr>
+            <a:picLocks noChangeAspect="1"/>
+          </p:cNvPicPr>
+          <p:nvPr/>
+        </p:nvPicPr>
+        <p:blipFill>
+          <a:blip r:embed="rId2"/>
+          <a:stretch>
+            <a:fillRect/>
+          </a:stretch>
+        </p:blipFill>
+        <p:spPr>
+          <a:xfrm>
+            <a:off x="1571166" y="1692000"/>
+            <a:ext cx="9049786" cy="3060000"/>
+          </a:xfrm>
+          <a:prstGeom prst="rect">
+            <a:avLst/>
+          </a:prstGeom>
+        </p:spPr>
+      </p:pic>
+      <p:sp>
+        <p:nvSpPr>
+          <p:cNvPr id="10" name="TextBox 9"/>
+          <p:cNvSpPr txBox="1"/>
+          <p:nvPr/>
+        </p:nvSpPr>
+        <p:spPr>
+          <a:xfrm>
+            <a:off x="432000" y="4860000"/>
+            <a:ext cx="11328119" cy="1530000"/>
           </a:xfrm>
           <a:prstGeom prst="rect">
             <a:avLst/>
@@ -24298,11 +24275,11 @@
           <a:p>
             <a:pPr algn="l">
               <a:lnSpc>
-                <a:spcPct val="155000"/>
+                <a:spcPct val="135000"/>
               </a:lnSpc>
             </a:pPr>
             <a:r>
-              <a:rPr sz="1700" b="1">
+              <a:rPr sz="1400" b="1">
                 <a:solidFill>
                   <a:srgbClr val="E0B574"/>
                 </a:solidFill>
@@ -24311,23 +24288,23 @@
               <a:t>■  </a:t>
             </a:r>
             <a:r>
-              <a:rPr sz="1700">
+              <a:rPr sz="1400">
                 <a:solidFill>
                   <a:srgbClr val="F2F4F7"/>
                 </a:solidFill>
                 <a:latin typeface="微软雅黑"/>
               </a:rPr>
-              <a:t>1952 年 Markowitz 均值方差：现代资产配置的起点，但对预期收益估计极度敏感</a:t>
+              <a:t>均值方差 (1952)：现代资产配置的起点，但对预期收益估计极敏感</a:t>
             </a:r>
           </a:p>
           <a:p>
             <a:pPr algn="l">
               <a:lnSpc>
-                <a:spcPct val="155000"/>
+                <a:spcPct val="135000"/>
               </a:lnSpc>
             </a:pPr>
             <a:r>
-              <a:rPr sz="1700" b="1">
+              <a:rPr sz="1400" b="1">
                 <a:solidFill>
                   <a:srgbClr val="E0B574"/>
                 </a:solidFill>
@@ -24336,23 +24313,23 @@
               <a:t>■  </a:t>
             </a:r>
             <a:r>
-              <a:rPr sz="1700">
+              <a:rPr sz="1400">
                 <a:solidFill>
                   <a:srgbClr val="F2F4F7"/>
                 </a:solidFill>
                 <a:latin typeface="微软雅黑"/>
               </a:rPr>
-              <a:t>1990 年代 Black-Litterman：引入主观观点，解决“极端权重”问题</a:t>
+              <a:t>Black-Litterman (1990)：引入主观观点，解决“极端权重”</a:t>
             </a:r>
           </a:p>
           <a:p>
             <a:pPr algn="l">
               <a:lnSpc>
-                <a:spcPct val="155000"/>
+                <a:spcPct val="135000"/>
               </a:lnSpc>
             </a:pPr>
             <a:r>
-              <a:rPr sz="1700" b="1">
+              <a:rPr sz="1400" b="1">
                 <a:solidFill>
                   <a:srgbClr val="E0B574"/>
                 </a:solidFill>
@@ -24361,23 +24338,23 @@
               <a:t>■  </a:t>
             </a:r>
             <a:r>
-              <a:rPr sz="1700">
+              <a:rPr sz="1400">
                 <a:solidFill>
                   <a:srgbClr val="F2F4F7"/>
                 </a:solidFill>
                 <a:latin typeface="微软雅黑"/>
               </a:rPr>
-              <a:t>2005 年前后 桥水 全天候 / 风险平价：从“资金预算”转向“风险预算”</a:t>
+              <a:t>全天候 / 风险平价 (2005)：从“资金预算”转向“风险预算”</a:t>
             </a:r>
           </a:p>
           <a:p>
             <a:pPr algn="l">
               <a:lnSpc>
-                <a:spcPct val="155000"/>
+                <a:spcPct val="135000"/>
               </a:lnSpc>
             </a:pPr>
             <a:r>
-              <a:rPr sz="1700" b="1">
+              <a:rPr sz="1400" b="1">
                 <a:solidFill>
                   <a:srgbClr val="E0B574"/>
                 </a:solidFill>
@@ -24386,23 +24363,23 @@
               <a:t>■  </a:t>
             </a:r>
             <a:r>
-              <a:rPr sz="1700">
+              <a:rPr sz="1400">
                 <a:solidFill>
                   <a:srgbClr val="F2F4F7"/>
                 </a:solidFill>
                 <a:latin typeface="微软雅黑"/>
               </a:rPr>
-              <a:t>2010 年代 因子投资 / Smart Beta：把超额收益拆解为可复制的风险溢价</a:t>
+              <a:t>因子投资 (2010s)：把超额收益拆解为可复制的风险溢价</a:t>
             </a:r>
           </a:p>
           <a:p>
             <a:pPr algn="l">
               <a:lnSpc>
-                <a:spcPct val="155000"/>
+                <a:spcPct val="135000"/>
               </a:lnSpc>
             </a:pPr>
             <a:r>
-              <a:rPr sz="1700" b="1">
+              <a:rPr sz="1400" b="1">
                 <a:solidFill>
                   <a:srgbClr val="E0B574"/>
                 </a:solidFill>
@@ -24411,13 +24388,13 @@
               <a:t>■  </a:t>
             </a:r>
             <a:r>
-              <a:rPr sz="1700">
+              <a:rPr sz="1400">
                 <a:solidFill>
                   <a:srgbClr val="F2F4F7"/>
                 </a:solidFill>
                 <a:latin typeface="微软雅黑"/>
               </a:rPr>
-              <a:t>2010 年代后 TDF / TRF：把投资目标与客户生命周期对齐，公募 FOF 是其在国内的产品落地</a:t>
+              <a:t>TDF / TRF (2010s+)：投资目标与客户生命周期对齐</a:t>
             </a:r>
           </a:p>
         </p:txBody>
@@ -24701,16 +24678,40 @@
           </a:p>
         </p:txBody>
       </p:sp>
-      <p:sp>
-        <p:nvSpPr>
-          <p:cNvPr id="9" name="TextBox 8"/>
+      <p:pic>
+        <p:nvPicPr>
+          <p:cNvPr id="9" name="Picture 8" descr="chart_three_layer_pyramid.png"/>
+          <p:cNvPicPr>
+            <a:picLocks noChangeAspect="1"/>
+          </p:cNvPicPr>
+          <p:nvPr/>
+        </p:nvPicPr>
+        <p:blipFill>
+          <a:blip r:embed="rId2"/>
+          <a:stretch>
+            <a:fillRect/>
+          </a:stretch>
+        </p:blipFill>
+        <p:spPr>
+          <a:xfrm>
+            <a:off x="5112000" y="1692000"/>
+            <a:ext cx="6120000" cy="3583234"/>
+          </a:xfrm>
+          <a:prstGeom prst="rect">
+            <a:avLst/>
+          </a:prstGeom>
+        </p:spPr>
+      </p:pic>
+      <p:sp>
+        <p:nvSpPr>
+          <p:cNvPr id="10" name="TextBox 9"/>
           <p:cNvSpPr txBox="1"/>
           <p:nvPr/>
         </p:nvSpPr>
         <p:spPr>
           <a:xfrm>
             <a:off x="432000" y="1692000"/>
-            <a:ext cx="11328119" cy="4518000"/>
+            <a:ext cx="4500000" cy="4518000"/>
           </a:xfrm>
           <a:prstGeom prst="rect">
             <a:avLst/>
@@ -24725,11 +24726,11 @@
           <a:p>
             <a:pPr algn="l">
               <a:lnSpc>
-                <a:spcPct val="155000"/>
+                <a:spcPct val="145000"/>
               </a:lnSpc>
             </a:pPr>
             <a:r>
-              <a:rPr sz="1700" b="1">
+              <a:rPr sz="1400" b="1">
                 <a:solidFill>
                   <a:srgbClr val="E0B574"/>
                 </a:solidFill>
@@ -24738,23 +24739,23 @@
               <a:t>■  </a:t>
             </a:r>
             <a:r>
-              <a:rPr sz="1700">
+              <a:rPr sz="1400">
                 <a:solidFill>
                   <a:srgbClr val="F2F4F7"/>
                 </a:solidFill>
                 <a:latin typeface="微软雅黑"/>
               </a:rPr>
-              <a:t>战略配置 SAA：基于长期均衡假设与客户风险偏好，确定大类资产中枢；解释组合 70%—80% 的长期回报</a:t>
+              <a:t>战略配置 SAA：长期均衡 +客户风险偏好，解释 70%—80% 长期回报</a:t>
             </a:r>
           </a:p>
           <a:p>
             <a:pPr algn="l">
               <a:lnSpc>
-                <a:spcPct val="155000"/>
+                <a:spcPct val="145000"/>
               </a:lnSpc>
             </a:pPr>
             <a:r>
-              <a:rPr sz="1700" b="1">
+              <a:rPr sz="1400" b="1">
                 <a:solidFill>
                   <a:srgbClr val="E0B574"/>
                 </a:solidFill>
@@ -24763,23 +24764,23 @@
               <a:t>■  </a:t>
             </a:r>
             <a:r>
-              <a:rPr sz="1700">
+              <a:rPr sz="1400">
                 <a:solidFill>
                   <a:srgbClr val="F2F4F7"/>
                 </a:solidFill>
                 <a:latin typeface="微软雅黑"/>
               </a:rPr>
-              <a:t>战术配置 TAA：基于 6—12 个月的宏观 / 估值 / 趋势判断，对中枢做 ±5%—±15% 的偏离</a:t>
+              <a:t>战术配置 TAA：基于 6—12 月宏观 / 估值 / 趋势，做 ±5%—±15% 偏离</a:t>
             </a:r>
           </a:p>
           <a:p>
             <a:pPr algn="l">
               <a:lnSpc>
-                <a:spcPct val="155000"/>
+                <a:spcPct val="145000"/>
               </a:lnSpc>
             </a:pPr>
             <a:r>
-              <a:rPr sz="1700" b="1">
+              <a:rPr sz="1400" b="1">
                 <a:solidFill>
                   <a:srgbClr val="E0B574"/>
                 </a:solidFill>
@@ -24788,23 +24789,23 @@
               <a:t>■  </a:t>
             </a:r>
             <a:r>
-              <a:rPr sz="1700">
+              <a:rPr sz="1400">
                 <a:solidFill>
                   <a:srgbClr val="F2F4F7"/>
                 </a:solidFill>
                 <a:latin typeface="微软雅黑"/>
               </a:rPr>
-              <a:t>动态再平衡：按既定规则把组合拉回目标，长期可贡献 0.3%—0.8% 的年化 α</a:t>
+              <a:t>动态再平衡：纪律化触发，长期贡献 0.3%—0.8% 年化 α</a:t>
             </a:r>
           </a:p>
           <a:p>
             <a:pPr algn="l">
               <a:lnSpc>
-                <a:spcPct val="155000"/>
+                <a:spcPct val="145000"/>
               </a:lnSpc>
             </a:pPr>
             <a:r>
-              <a:rPr sz="1700" b="1">
+              <a:rPr sz="1400" b="1">
                 <a:solidFill>
                   <a:srgbClr val="E0B574"/>
                 </a:solidFill>
@@ -24813,23 +24814,23 @@
               <a:t>■  </a:t>
             </a:r>
             <a:r>
-              <a:rPr sz="1700">
+              <a:rPr sz="1400">
                 <a:solidFill>
                   <a:srgbClr val="F2F4F7"/>
                 </a:solidFill>
                 <a:latin typeface="微软雅黑"/>
               </a:rPr>
-              <a:t>三层的清晰分工 → 让“配置”与“择时”可以分别归因、分别考核</a:t>
+              <a:t>三层清晰分工 → 配置与择时可分别归因 / 分别考核</a:t>
             </a:r>
           </a:p>
           <a:p>
             <a:pPr algn="l">
               <a:lnSpc>
-                <a:spcPct val="155000"/>
+                <a:spcPct val="145000"/>
               </a:lnSpc>
             </a:pPr>
             <a:r>
-              <a:rPr sz="1700" b="1">
+              <a:rPr sz="1400" b="1">
                 <a:solidFill>
                   <a:srgbClr val="E0B574"/>
                 </a:solidFill>
@@ -24838,13 +24839,13 @@
               <a:t>■  </a:t>
             </a:r>
             <a:r>
-              <a:rPr sz="1700">
+              <a:rPr sz="1400">
                 <a:solidFill>
                   <a:srgbClr val="F2F4F7"/>
                 </a:solidFill>
                 <a:latin typeface="微软雅黑"/>
               </a:rPr>
-              <a:t>公募 FOF 的合规优势：边界明确，便于把三层框架写进产品合同</a:t>
+              <a:t>公募 FOF 合规优势：边界明确，三层框架可直接写入合同</a:t>
             </a:r>
           </a:p>
         </p:txBody>
@@ -25123,21 +25124,45 @@
                 </a:solidFill>
                 <a:latin typeface="微软雅黑"/>
               </a:rPr>
-              <a:t>8 年发展 · 1500 亿元规模 · 头部集中</a:t>
-            </a:r>
-          </a:p>
-        </p:txBody>
-      </p:sp>
-      <p:sp>
-        <p:nvSpPr>
-          <p:cNvPr id="9" name="TextBox 8"/>
+              <a:t>8 年发展 · 1500 亿元规模 · 仍有 10 倍空间</a:t>
+            </a:r>
+          </a:p>
+        </p:txBody>
+      </p:sp>
+      <p:pic>
+        <p:nvPicPr>
+          <p:cNvPr id="9" name="Picture 8" descr="chart_fof_market_growth.png"/>
+          <p:cNvPicPr>
+            <a:picLocks noChangeAspect="1"/>
+          </p:cNvPicPr>
+          <p:nvPr/>
+        </p:nvPicPr>
+        <p:blipFill>
+          <a:blip r:embed="rId2"/>
+          <a:stretch>
+            <a:fillRect/>
+          </a:stretch>
+        </p:blipFill>
+        <p:spPr>
+          <a:xfrm>
+            <a:off x="5112000" y="1692000"/>
+            <a:ext cx="6300000" cy="3436364"/>
+          </a:xfrm>
+          <a:prstGeom prst="rect">
+            <a:avLst/>
+          </a:prstGeom>
+        </p:spPr>
+      </p:pic>
+      <p:sp>
+        <p:nvSpPr>
+          <p:cNvPr id="10" name="TextBox 9"/>
           <p:cNvSpPr txBox="1"/>
           <p:nvPr/>
         </p:nvSpPr>
         <p:spPr>
           <a:xfrm>
             <a:off x="432000" y="1692000"/>
-            <a:ext cx="11328119" cy="4518000"/>
+            <a:ext cx="4500000" cy="4518000"/>
           </a:xfrm>
           <a:prstGeom prst="rect">
             <a:avLst/>
@@ -25152,11 +25177,11 @@
           <a:p>
             <a:pPr algn="l">
               <a:lnSpc>
-                <a:spcPct val="155000"/>
+                <a:spcPct val="145000"/>
               </a:lnSpc>
             </a:pPr>
             <a:r>
-              <a:rPr sz="1700" b="1">
+              <a:rPr sz="1400" b="1">
                 <a:solidFill>
                   <a:srgbClr val="E0B574"/>
                 </a:solidFill>
@@ -25165,7 +25190,7 @@
               <a:t>■  </a:t>
             </a:r>
             <a:r>
-              <a:rPr sz="1700">
+              <a:rPr sz="1400">
                 <a:solidFill>
                   <a:srgbClr val="F2F4F7"/>
                 </a:solidFill>
@@ -25177,11 +25202,11 @@
           <a:p>
             <a:pPr algn="l">
               <a:lnSpc>
-                <a:spcPct val="155000"/>
+                <a:spcPct val="145000"/>
               </a:lnSpc>
             </a:pPr>
             <a:r>
-              <a:rPr sz="1700" b="1">
+              <a:rPr sz="1400" b="1">
                 <a:solidFill>
                   <a:srgbClr val="E0B574"/>
                 </a:solidFill>
@@ -25190,23 +25215,23 @@
               <a:t>■  </a:t>
             </a:r>
             <a:r>
-              <a:rPr sz="1700">
+              <a:rPr sz="1400">
                 <a:solidFill>
                   <a:srgbClr val="F2F4F7"/>
                 </a:solidFill>
                 <a:latin typeface="微软雅黑"/>
               </a:rPr>
-              <a:t>市场规模：产品数量超 500 只，总规模约 1500 亿元，相比海外仍有 10 倍空间</a:t>
+              <a:t>市场规模：产品数 超 500 只，总规模约 1500 亿元</a:t>
             </a:r>
           </a:p>
           <a:p>
             <a:pPr algn="l">
               <a:lnSpc>
-                <a:spcPct val="155000"/>
+                <a:spcPct val="145000"/>
               </a:lnSpc>
             </a:pPr>
             <a:r>
-              <a:rPr sz="1700" b="1">
+              <a:rPr sz="1400" b="1">
                 <a:solidFill>
                   <a:srgbClr val="E0B574"/>
                 </a:solidFill>
@@ -25215,23 +25240,23 @@
               <a:t>■  </a:t>
             </a:r>
             <a:r>
-              <a:rPr sz="1700">
+              <a:rPr sz="1400">
                 <a:solidFill>
                   <a:srgbClr val="F2F4F7"/>
                 </a:solidFill>
                 <a:latin typeface="微软雅黑"/>
               </a:rPr>
-              <a:t>产品分类：普通 FOF / 养老目标日期 / 养老目标风险 / ETF-FOF 四类</a:t>
+              <a:t>对标海外：成熟市场 FOF 规模 3 万亿美元 +，国内渗透率不足 1/30</a:t>
             </a:r>
           </a:p>
           <a:p>
             <a:pPr algn="l">
               <a:lnSpc>
-                <a:spcPct val="155000"/>
+                <a:spcPct val="145000"/>
               </a:lnSpc>
             </a:pPr>
             <a:r>
-              <a:rPr sz="1700" b="1">
+              <a:rPr sz="1400" b="1">
                 <a:solidFill>
                   <a:srgbClr val="E0B574"/>
                 </a:solidFill>
@@ -25240,23 +25265,23 @@
               <a:t>■  </a:t>
             </a:r>
             <a:r>
-              <a:rPr sz="1700">
+              <a:rPr sz="1400">
                 <a:solidFill>
                   <a:srgbClr val="F2F4F7"/>
                 </a:solidFill>
                 <a:latin typeface="微软雅黑"/>
               </a:rPr>
-              <a:t>头部集中：前 10 名管理人占行业规模约 60%</a:t>
+              <a:t>产品分类：普通 / 养老目标日期 / 养老目标风险 / ETF-FOF</a:t>
             </a:r>
           </a:p>
           <a:p>
             <a:pPr algn="l">
               <a:lnSpc>
-                <a:spcPct val="155000"/>
+                <a:spcPct val="145000"/>
               </a:lnSpc>
             </a:pPr>
             <a:r>
-              <a:rPr sz="1700" b="1">
+              <a:rPr sz="1400" b="1">
                 <a:solidFill>
                   <a:srgbClr val="E0B574"/>
                 </a:solidFill>
@@ -25265,13 +25290,48 @@
               <a:t>■  </a:t>
             </a:r>
             <a:r>
-              <a:rPr sz="1700">
+              <a:rPr sz="1400">
                 <a:solidFill>
                   <a:srgbClr val="F2F4F7"/>
                 </a:solidFill>
                 <a:latin typeface="微软雅黑"/>
               </a:rPr>
-              <a:t>三大趋势：①养老 FOF 借第三支柱起量　②ETF-FOF 成本优势凸显　③全球配置型逐步推出</a:t>
+              <a:t>三大趋势：养老起量 · ETF-FOF 降费 · 全球配置型推出</a:t>
+            </a:r>
+          </a:p>
+        </p:txBody>
+      </p:sp>
+      <p:sp>
+        <p:nvSpPr>
+          <p:cNvPr id="11" name="TextBox 10"/>
+          <p:cNvSpPr txBox="1"/>
+          <p:nvPr/>
+        </p:nvSpPr>
+        <p:spPr>
+          <a:xfrm>
+            <a:off x="432000" y="6282000"/>
+            <a:ext cx="11160000" cy="216000"/>
+          </a:xfrm>
+          <a:prstGeom prst="rect">
+            <a:avLst/>
+          </a:prstGeom>
+          <a:noFill/>
+        </p:spPr>
+        <p:txBody>
+          <a:bodyPr wrap="square" lIns="36000" rIns="36000" tIns="18000" bIns="18000" anchor="t">
+            <a:spAutoFit/>
+          </a:bodyPr>
+          <a:lstStyle/>
+          <a:p>
+            <a:pPr algn="l"/>
+            <a:r>
+              <a:rPr sz="1000" b="0">
+                <a:solidFill>
+                  <a:srgbClr val="B6C4D6"/>
+                </a:solidFill>
+                <a:latin typeface="微软雅黑"/>
+              </a:rPr>
+              <a:t>数据来源：基于行业公开口径估算（2017—2025），仅供示意</a:t>
             </a:r>
           </a:p>
         </p:txBody>
